--- a/instructor/slides/pptx/sections/07-intermediate-transforms.pptx
+++ b/instructor/slides/pptx/sections/07-intermediate-transforms.pptx
@@ -3741,8 +3741,8 @@
         </p:nvSpPr>
         <p:spPr>
           <a:xfrm>
-            <a:off x="640080" y="1920240"/>
-            <a:ext cx="10972800" cy="1463040"/>
+            <a:off x="640080" y="1828800"/>
+            <a:ext cx="6675120" cy="1645920"/>
           </a:xfrm>
           <a:prstGeom prst="rect">
             <a:avLst/>
@@ -3756,7 +3756,7 @@
           <a:lstStyle/>
           <a:p>
             <a:r>
-              <a:rPr sz="4400" b="1">
+              <a:rPr sz="4000" b="1">
                 <a:solidFill>
                   <a:srgbClr val="FFFFFF"/>
                 </a:solidFill>
@@ -3775,8 +3775,8 @@
         </p:nvSpPr>
         <p:spPr>
           <a:xfrm>
-            <a:off x="640080" y="3657600"/>
-            <a:ext cx="10789920" cy="1097280"/>
+            <a:off x="640080" y="3794760"/>
+            <a:ext cx="6675120" cy="1097280"/>
           </a:xfrm>
           <a:prstGeom prst="rect">
             <a:avLst/>
@@ -3790,7 +3790,7 @@
           <a:lstStyle/>
           <a:p>
             <a:r>
-              <a:rPr sz="2000" b="0">
+              <a:rPr sz="1800" b="0">
                 <a:solidFill>
                   <a:srgbClr val="B7CBDE"/>
                 </a:solidFill>
@@ -3801,6 +3801,30 @@
           </a:p>
         </p:txBody>
       </p:sp>
+      <p:pic>
+        <p:nvPicPr>
+          <p:cNvPr id="6" name="Picture 5" descr="dw-dates.jpg"/>
+          <p:cNvPicPr>
+            <a:picLocks noChangeAspect="1"/>
+          </p:cNvPicPr>
+          <p:nvPr/>
+        </p:nvPicPr>
+        <p:blipFill>
+          <a:blip r:embed="rId2"/>
+          <a:stretch>
+            <a:fillRect/>
+          </a:stretch>
+        </p:blipFill>
+        <p:spPr>
+          <a:xfrm>
+            <a:off x="7452360" y="1325880"/>
+            <a:ext cx="4160520" cy="4160520"/>
+          </a:xfrm>
+          <a:prstGeom prst="rect">
+            <a:avLst/>
+          </a:prstGeom>
+        </p:spPr>
+      </p:pic>
     </p:spTree>
   </p:cSld>
   <p:clrMapOvr>
@@ -3904,8 +3928,8 @@
         </p:nvSpPr>
         <p:spPr>
           <a:xfrm>
-            <a:off x="640080" y="685800"/>
-            <a:ext cx="10972800" cy="1463040"/>
+            <a:off x="640080" y="658368"/>
+            <a:ext cx="7863840" cy="1645920"/>
           </a:xfrm>
           <a:prstGeom prst="rect">
             <a:avLst/>
@@ -3919,7 +3943,7 @@
           <a:lstStyle/>
           <a:p>
             <a:r>
-              <a:rPr sz="3200" b="1">
+              <a:rPr sz="3000" b="1">
                 <a:solidFill>
                   <a:srgbClr val="FFFFFF"/>
                 </a:solidFill>
@@ -3938,8 +3962,8 @@
         </p:nvSpPr>
         <p:spPr>
           <a:xfrm>
-            <a:off x="777240" y="2286000"/>
-            <a:ext cx="10607040" cy="4754880"/>
+            <a:off x="777240" y="2331720"/>
+            <a:ext cx="7498079" cy="4754880"/>
           </a:xfrm>
           <a:prstGeom prst="rect">
             <a:avLst/>
@@ -3958,7 +3982,7 @@
               </a:spcAft>
             </a:pPr>
             <a:r>
-              <a:rPr sz="2400" b="0">
+              <a:rPr sz="2200" b="0">
                 <a:solidFill>
                   <a:srgbClr val="FFFFFF"/>
                 </a:solidFill>
@@ -3974,7 +3998,7 @@
               </a:spcAft>
             </a:pPr>
             <a:r>
-              <a:rPr sz="2400" b="0">
+              <a:rPr sz="2200" b="0">
                 <a:solidFill>
                   <a:srgbClr val="FFFFFF"/>
                 </a:solidFill>
@@ -3990,7 +4014,7 @@
               </a:spcAft>
             </a:pPr>
             <a:r>
-              <a:rPr sz="2400" b="0">
+              <a:rPr sz="2200" b="0">
                 <a:solidFill>
                   <a:srgbClr val="FFFFFF"/>
                 </a:solidFill>
@@ -4001,6 +4025,30 @@
           </a:p>
         </p:txBody>
       </p:sp>
+      <p:pic>
+        <p:nvPicPr>
+          <p:cNvPr id="6" name="Picture 5" descr="dw-dates.jpg"/>
+          <p:cNvPicPr>
+            <a:picLocks noChangeAspect="1"/>
+          </p:cNvPicPr>
+          <p:nvPr/>
+        </p:nvPicPr>
+        <p:blipFill>
+          <a:blip r:embed="rId2"/>
+          <a:stretch>
+            <a:fillRect/>
+          </a:stretch>
+        </p:blipFill>
+        <p:spPr>
+          <a:xfrm>
+            <a:off x="8732520" y="2057400"/>
+            <a:ext cx="2880360" cy="2880360"/>
+          </a:xfrm>
+          <a:prstGeom prst="rect">
+            <a:avLst/>
+          </a:prstGeom>
+        </p:spPr>
+      </p:pic>
     </p:spTree>
   </p:cSld>
   <p:clrMapOvr>
@@ -4104,8 +4152,8 @@
         </p:nvSpPr>
         <p:spPr>
           <a:xfrm>
-            <a:off x="640080" y="685800"/>
-            <a:ext cx="10972800" cy="1463040"/>
+            <a:off x="640080" y="658368"/>
+            <a:ext cx="7863840" cy="1645920"/>
           </a:xfrm>
           <a:prstGeom prst="rect">
             <a:avLst/>
@@ -4119,7 +4167,7 @@
           <a:lstStyle/>
           <a:p>
             <a:r>
-              <a:rPr sz="3200" b="1">
+              <a:rPr sz="3000" b="1">
                 <a:solidFill>
                   <a:srgbClr val="FFFFFF"/>
                 </a:solidFill>
@@ -4138,8 +4186,8 @@
         </p:nvSpPr>
         <p:spPr>
           <a:xfrm>
-            <a:off x="777240" y="2286000"/>
-            <a:ext cx="10607040" cy="4754880"/>
+            <a:off x="777240" y="2331720"/>
+            <a:ext cx="7498079" cy="4754880"/>
           </a:xfrm>
           <a:prstGeom prst="rect">
             <a:avLst/>
@@ -4158,7 +4206,7 @@
               </a:spcAft>
             </a:pPr>
             <a:r>
-              <a:rPr sz="2400" b="0">
+              <a:rPr sz="2200" b="0">
                 <a:solidFill>
                   <a:srgbClr val="FFFFFF"/>
                 </a:solidFill>
@@ -4174,7 +4222,7 @@
               </a:spcAft>
             </a:pPr>
             <a:r>
-              <a:rPr sz="2400" b="0">
+              <a:rPr sz="2200" b="0">
                 <a:solidFill>
                   <a:srgbClr val="FFFFFF"/>
                 </a:solidFill>
@@ -4185,6 +4233,30 @@
           </a:p>
         </p:txBody>
       </p:sp>
+      <p:pic>
+        <p:nvPicPr>
+          <p:cNvPr id="6" name="Picture 5" descr="dw-dates.jpg"/>
+          <p:cNvPicPr>
+            <a:picLocks noChangeAspect="1"/>
+          </p:cNvPicPr>
+          <p:nvPr/>
+        </p:nvPicPr>
+        <p:blipFill>
+          <a:blip r:embed="rId2"/>
+          <a:stretch>
+            <a:fillRect/>
+          </a:stretch>
+        </p:blipFill>
+        <p:spPr>
+          <a:xfrm>
+            <a:off x="8732520" y="2057400"/>
+            <a:ext cx="2880360" cy="2880360"/>
+          </a:xfrm>
+          <a:prstGeom prst="rect">
+            <a:avLst/>
+          </a:prstGeom>
+        </p:spPr>
+      </p:pic>
     </p:spTree>
   </p:cSld>
   <p:clrMapOvr>
@@ -4288,8 +4360,8 @@
         </p:nvSpPr>
         <p:spPr>
           <a:xfrm>
-            <a:off x="640080" y="685800"/>
-            <a:ext cx="10972800" cy="1463040"/>
+            <a:off x="640080" y="658368"/>
+            <a:ext cx="7863840" cy="1645920"/>
           </a:xfrm>
           <a:prstGeom prst="rect">
             <a:avLst/>
@@ -4303,7 +4375,7 @@
           <a:lstStyle/>
           <a:p>
             <a:r>
-              <a:rPr sz="3200" b="1">
+              <a:rPr sz="3000" b="1">
                 <a:solidFill>
                   <a:srgbClr val="FFFFFF"/>
                 </a:solidFill>
@@ -4322,8 +4394,8 @@
         </p:nvSpPr>
         <p:spPr>
           <a:xfrm>
-            <a:off x="777240" y="2286000"/>
-            <a:ext cx="10607040" cy="4754880"/>
+            <a:off x="777240" y="2331720"/>
+            <a:ext cx="7498079" cy="4754880"/>
           </a:xfrm>
           <a:prstGeom prst="rect">
             <a:avLst/>
@@ -4342,7 +4414,7 @@
               </a:spcAft>
             </a:pPr>
             <a:r>
-              <a:rPr sz="2400" b="0">
+              <a:rPr sz="2200" b="0">
                 <a:solidFill>
                   <a:srgbClr val="FFFFFF"/>
                 </a:solidFill>
@@ -4358,7 +4430,7 @@
               </a:spcAft>
             </a:pPr>
             <a:r>
-              <a:rPr sz="2400" b="0">
+              <a:rPr sz="2200" b="0">
                 <a:solidFill>
                   <a:srgbClr val="FFFFFF"/>
                 </a:solidFill>
@@ -4374,7 +4446,7 @@
               </a:spcAft>
             </a:pPr>
             <a:r>
-              <a:rPr sz="2400" b="0">
+              <a:rPr sz="2200" b="0">
                 <a:solidFill>
                   <a:srgbClr val="FFFFFF"/>
                 </a:solidFill>
@@ -4390,7 +4462,7 @@
               </a:spcAft>
             </a:pPr>
             <a:r>
-              <a:rPr sz="2400" b="0">
+              <a:rPr sz="2200" b="0">
                 <a:solidFill>
                   <a:srgbClr val="FFFFFF"/>
                 </a:solidFill>
@@ -4401,6 +4473,30 @@
           </a:p>
         </p:txBody>
       </p:sp>
+      <p:pic>
+        <p:nvPicPr>
+          <p:cNvPr id="6" name="Picture 5" descr="dw-dates.jpg"/>
+          <p:cNvPicPr>
+            <a:picLocks noChangeAspect="1"/>
+          </p:cNvPicPr>
+          <p:nvPr/>
+        </p:nvPicPr>
+        <p:blipFill>
+          <a:blip r:embed="rId2"/>
+          <a:stretch>
+            <a:fillRect/>
+          </a:stretch>
+        </p:blipFill>
+        <p:spPr>
+          <a:xfrm>
+            <a:off x="8732520" y="2057400"/>
+            <a:ext cx="2880360" cy="2880360"/>
+          </a:xfrm>
+          <a:prstGeom prst="rect">
+            <a:avLst/>
+          </a:prstGeom>
+        </p:spPr>
+      </p:pic>
     </p:spTree>
   </p:cSld>
   <p:clrMapOvr>
@@ -4504,8 +4600,8 @@
         </p:nvSpPr>
         <p:spPr>
           <a:xfrm>
-            <a:off x="640080" y="685800"/>
-            <a:ext cx="10972800" cy="1463040"/>
+            <a:off x="640080" y="658368"/>
+            <a:ext cx="7863840" cy="1645920"/>
           </a:xfrm>
           <a:prstGeom prst="rect">
             <a:avLst/>
@@ -4519,7 +4615,7 @@
           <a:lstStyle/>
           <a:p>
             <a:r>
-              <a:rPr sz="3200" b="1">
+              <a:rPr sz="3000" b="1">
                 <a:solidFill>
                   <a:srgbClr val="FFFFFF"/>
                 </a:solidFill>
@@ -4538,8 +4634,8 @@
         </p:nvSpPr>
         <p:spPr>
           <a:xfrm>
-            <a:off x="777240" y="2286000"/>
-            <a:ext cx="10607040" cy="4754880"/>
+            <a:off x="777240" y="2331720"/>
+            <a:ext cx="7498079" cy="4754880"/>
           </a:xfrm>
           <a:prstGeom prst="rect">
             <a:avLst/>
@@ -4558,7 +4654,7 @@
               </a:spcAft>
             </a:pPr>
             <a:r>
-              <a:rPr sz="2400" b="0">
+              <a:rPr sz="2200" b="0">
                 <a:solidFill>
                   <a:srgbClr val="FFFFFF"/>
                 </a:solidFill>
@@ -4574,7 +4670,7 @@
               </a:spcAft>
             </a:pPr>
             <a:r>
-              <a:rPr sz="2400" b="0">
+              <a:rPr sz="2200" b="0">
                 <a:solidFill>
                   <a:srgbClr val="FFFFFF"/>
                 </a:solidFill>
@@ -4590,7 +4686,7 @@
               </a:spcAft>
             </a:pPr>
             <a:r>
-              <a:rPr sz="2400" b="0">
+              <a:rPr sz="2200" b="0">
                 <a:solidFill>
                   <a:srgbClr val="FFFFFF"/>
                 </a:solidFill>
@@ -4606,7 +4702,7 @@
               </a:spcAft>
             </a:pPr>
             <a:r>
-              <a:rPr sz="2400" b="0">
+              <a:rPr sz="2200" b="0">
                 <a:solidFill>
                   <a:srgbClr val="FFFFFF"/>
                 </a:solidFill>
@@ -4617,6 +4713,30 @@
           </a:p>
         </p:txBody>
       </p:sp>
+      <p:pic>
+        <p:nvPicPr>
+          <p:cNvPr id="6" name="Picture 5" descr="dw-dates.jpg"/>
+          <p:cNvPicPr>
+            <a:picLocks noChangeAspect="1"/>
+          </p:cNvPicPr>
+          <p:nvPr/>
+        </p:nvPicPr>
+        <p:blipFill>
+          <a:blip r:embed="rId2"/>
+          <a:stretch>
+            <a:fillRect/>
+          </a:stretch>
+        </p:blipFill>
+        <p:spPr>
+          <a:xfrm>
+            <a:off x="8732520" y="2057400"/>
+            <a:ext cx="2880360" cy="2880360"/>
+          </a:xfrm>
+          <a:prstGeom prst="rect">
+            <a:avLst/>
+          </a:prstGeom>
+        </p:spPr>
+      </p:pic>
     </p:spTree>
   </p:cSld>
   <p:clrMapOvr>
@@ -4720,8 +4840,8 @@
         </p:nvSpPr>
         <p:spPr>
           <a:xfrm>
-            <a:off x="640080" y="685800"/>
-            <a:ext cx="10972800" cy="1463040"/>
+            <a:off x="640080" y="658368"/>
+            <a:ext cx="7863840" cy="1645920"/>
           </a:xfrm>
           <a:prstGeom prst="rect">
             <a:avLst/>
@@ -4735,7 +4855,7 @@
           <a:lstStyle/>
           <a:p>
             <a:r>
-              <a:rPr sz="3200" b="1">
+              <a:rPr sz="3000" b="1">
                 <a:solidFill>
                   <a:srgbClr val="FFFFFF"/>
                 </a:solidFill>
@@ -4754,8 +4874,8 @@
         </p:nvSpPr>
         <p:spPr>
           <a:xfrm>
-            <a:off x="777240" y="2286000"/>
-            <a:ext cx="10607040" cy="4754880"/>
+            <a:off x="777240" y="2331720"/>
+            <a:ext cx="7498079" cy="4754880"/>
           </a:xfrm>
           <a:prstGeom prst="rect">
             <a:avLst/>
@@ -4774,7 +4894,7 @@
               </a:spcAft>
             </a:pPr>
             <a:r>
-              <a:rPr sz="2400" b="0">
+              <a:rPr sz="2200" b="0">
                 <a:solidFill>
                   <a:srgbClr val="FFFFFF"/>
                 </a:solidFill>
@@ -4790,7 +4910,7 @@
               </a:spcAft>
             </a:pPr>
             <a:r>
-              <a:rPr sz="2400" b="0">
+              <a:rPr sz="2200" b="0">
                 <a:solidFill>
                   <a:srgbClr val="FFFFFF"/>
                 </a:solidFill>
@@ -4806,7 +4926,7 @@
               </a:spcAft>
             </a:pPr>
             <a:r>
-              <a:rPr sz="2400" b="0">
+              <a:rPr sz="2200" b="0">
                 <a:solidFill>
                   <a:srgbClr val="FFFFFF"/>
                 </a:solidFill>
@@ -4822,7 +4942,7 @@
               </a:spcAft>
             </a:pPr>
             <a:r>
-              <a:rPr sz="2400" b="0">
+              <a:rPr sz="2200" b="0">
                 <a:solidFill>
                   <a:srgbClr val="FFFFFF"/>
                 </a:solidFill>
@@ -4833,6 +4953,30 @@
           </a:p>
         </p:txBody>
       </p:sp>
+      <p:pic>
+        <p:nvPicPr>
+          <p:cNvPr id="6" name="Picture 5" descr="dw-interview.jpg"/>
+          <p:cNvPicPr>
+            <a:picLocks noChangeAspect="1"/>
+          </p:cNvPicPr>
+          <p:nvPr/>
+        </p:nvPicPr>
+        <p:blipFill>
+          <a:blip r:embed="rId2"/>
+          <a:stretch>
+            <a:fillRect/>
+          </a:stretch>
+        </p:blipFill>
+        <p:spPr>
+          <a:xfrm>
+            <a:off x="8732520" y="2057400"/>
+            <a:ext cx="2880360" cy="2880360"/>
+          </a:xfrm>
+          <a:prstGeom prst="rect">
+            <a:avLst/>
+          </a:prstGeom>
+        </p:spPr>
+      </p:pic>
     </p:spTree>
   </p:cSld>
   <p:clrMapOvr>
@@ -4936,8 +5080,8 @@
         </p:nvSpPr>
         <p:spPr>
           <a:xfrm>
-            <a:off x="640080" y="685800"/>
-            <a:ext cx="10972800" cy="1463040"/>
+            <a:off x="640080" y="658368"/>
+            <a:ext cx="7863840" cy="1645920"/>
           </a:xfrm>
           <a:prstGeom prst="rect">
             <a:avLst/>
@@ -4951,7 +5095,7 @@
           <a:lstStyle/>
           <a:p>
             <a:r>
-              <a:rPr sz="3200" b="1">
+              <a:rPr sz="3000" b="1">
                 <a:solidFill>
                   <a:srgbClr val="FFFFFF"/>
                 </a:solidFill>
@@ -4970,8 +5114,8 @@
         </p:nvSpPr>
         <p:spPr>
           <a:xfrm>
-            <a:off x="777240" y="2286000"/>
-            <a:ext cx="10607040" cy="4754880"/>
+            <a:off x="777240" y="2331720"/>
+            <a:ext cx="7498079" cy="4754880"/>
           </a:xfrm>
           <a:prstGeom prst="rect">
             <a:avLst/>
@@ -4990,7 +5134,7 @@
               </a:spcAft>
             </a:pPr>
             <a:r>
-              <a:rPr sz="2400" b="0">
+              <a:rPr sz="2200" b="0">
                 <a:solidFill>
                   <a:srgbClr val="FFFFFF"/>
                 </a:solidFill>
@@ -5006,7 +5150,7 @@
               </a:spcAft>
             </a:pPr>
             <a:r>
-              <a:rPr sz="2400" b="0">
+              <a:rPr sz="2200" b="0">
                 <a:solidFill>
                   <a:srgbClr val="FFFFFF"/>
                 </a:solidFill>
@@ -5022,7 +5166,7 @@
               </a:spcAft>
             </a:pPr>
             <a:r>
-              <a:rPr sz="2400" b="0">
+              <a:rPr sz="2200" b="0">
                 <a:solidFill>
                   <a:srgbClr val="FFFFFF"/>
                 </a:solidFill>
@@ -5038,7 +5182,7 @@
               </a:spcAft>
             </a:pPr>
             <a:r>
-              <a:rPr sz="2400" b="0">
+              <a:rPr sz="2200" b="0">
                 <a:solidFill>
                   <a:srgbClr val="FFFFFF"/>
                 </a:solidFill>
@@ -5049,6 +5193,30 @@
           </a:p>
         </p:txBody>
       </p:sp>
+      <p:pic>
+        <p:nvPicPr>
+          <p:cNvPr id="6" name="Picture 5" descr="dw-interview.jpg"/>
+          <p:cNvPicPr>
+            <a:picLocks noChangeAspect="1"/>
+          </p:cNvPicPr>
+          <p:nvPr/>
+        </p:nvPicPr>
+        <p:blipFill>
+          <a:blip r:embed="rId2"/>
+          <a:stretch>
+            <a:fillRect/>
+          </a:stretch>
+        </p:blipFill>
+        <p:spPr>
+          <a:xfrm>
+            <a:off x="8732520" y="2057400"/>
+            <a:ext cx="2880360" cy="2880360"/>
+          </a:xfrm>
+          <a:prstGeom prst="rect">
+            <a:avLst/>
+          </a:prstGeom>
+        </p:spPr>
+      </p:pic>
     </p:spTree>
   </p:cSld>
   <p:clrMapOvr>
@@ -5152,8 +5320,8 @@
         </p:nvSpPr>
         <p:spPr>
           <a:xfrm>
-            <a:off x="640080" y="685800"/>
-            <a:ext cx="10972800" cy="1463040"/>
+            <a:off x="640080" y="658368"/>
+            <a:ext cx="10972800" cy="1645920"/>
           </a:xfrm>
           <a:prstGeom prst="rect">
             <a:avLst/>
@@ -5167,7 +5335,7 @@
           <a:lstStyle/>
           <a:p>
             <a:r>
-              <a:rPr sz="3200" b="1">
+              <a:rPr sz="3000" b="1">
                 <a:solidFill>
                   <a:srgbClr val="FFFFFF"/>
                 </a:solidFill>
@@ -5449,8 +5617,8 @@
         </p:nvSpPr>
         <p:spPr>
           <a:xfrm>
-            <a:off x="640080" y="685800"/>
-            <a:ext cx="10972800" cy="1463040"/>
+            <a:off x="640080" y="658368"/>
+            <a:ext cx="7863840" cy="1645920"/>
           </a:xfrm>
           <a:prstGeom prst="rect">
             <a:avLst/>
@@ -5464,7 +5632,7 @@
           <a:lstStyle/>
           <a:p>
             <a:r>
-              <a:rPr sz="3200" b="1">
+              <a:rPr sz="3000" b="1">
                 <a:solidFill>
                   <a:srgbClr val="FFFFFF"/>
                 </a:solidFill>
@@ -5483,8 +5651,8 @@
         </p:nvSpPr>
         <p:spPr>
           <a:xfrm>
-            <a:off x="777240" y="2286000"/>
-            <a:ext cx="10607040" cy="4754880"/>
+            <a:off x="777240" y="2331720"/>
+            <a:ext cx="7498079" cy="4754880"/>
           </a:xfrm>
           <a:prstGeom prst="rect">
             <a:avLst/>
@@ -5503,7 +5671,7 @@
               </a:spcAft>
             </a:pPr>
             <a:r>
-              <a:rPr sz="2400" b="0">
+              <a:rPr sz="2200" b="0">
                 <a:solidFill>
                   <a:srgbClr val="FFFFFF"/>
                 </a:solidFill>
@@ -5519,7 +5687,7 @@
               </a:spcAft>
             </a:pPr>
             <a:r>
-              <a:rPr sz="2400" b="0">
+              <a:rPr sz="2200" b="0">
                 <a:solidFill>
                   <a:srgbClr val="FFFFFF"/>
                 </a:solidFill>
@@ -5535,7 +5703,7 @@
               </a:spcAft>
             </a:pPr>
             <a:r>
-              <a:rPr sz="2400" b="0">
+              <a:rPr sz="2200" b="0">
                 <a:solidFill>
                   <a:srgbClr val="FFFFFF"/>
                 </a:solidFill>
@@ -5551,7 +5719,7 @@
               </a:spcAft>
             </a:pPr>
             <a:r>
-              <a:rPr sz="2400" b="0">
+              <a:rPr sz="2200" b="0">
                 <a:solidFill>
                   <a:srgbClr val="FFFFFF"/>
                 </a:solidFill>
@@ -5562,6 +5730,30 @@
           </a:p>
         </p:txBody>
       </p:sp>
+      <p:pic>
+        <p:nvPicPr>
+          <p:cNvPr id="6" name="Picture 5" descr="dw-loop.jpg"/>
+          <p:cNvPicPr>
+            <a:picLocks noChangeAspect="1"/>
+          </p:cNvPicPr>
+          <p:nvPr/>
+        </p:nvPicPr>
+        <p:blipFill>
+          <a:blip r:embed="rId2"/>
+          <a:stretch>
+            <a:fillRect/>
+          </a:stretch>
+        </p:blipFill>
+        <p:spPr>
+          <a:xfrm>
+            <a:off x="8549640" y="1965960"/>
+            <a:ext cx="3108960" cy="3108960"/>
+          </a:xfrm>
+          <a:prstGeom prst="rect">
+            <a:avLst/>
+          </a:prstGeom>
+        </p:spPr>
+      </p:pic>
     </p:spTree>
   </p:cSld>
   <p:clrMapOvr>
